--- a/B2C-To-EEID-Migration-Tool/B2C-To-EEID-Migration.pptx
+++ b/B2C-To-EEID-Migration-Tool/B2C-To-EEID-Migration.pptx
@@ -5,10 +5,10 @@
     <p:sldMasterId id="2147483648" r:id="rId1"/>
   </p:sldMasterIdLst>
   <p:notesMasterIdLst>
-    <p:notesMasterId r:id="rId18"/>
+    <p:notesMasterId r:id="rId19"/>
   </p:notesMasterIdLst>
   <p:handoutMasterIdLst>
-    <p:handoutMasterId r:id="rId19"/>
+    <p:handoutMasterId r:id="rId20"/>
   </p:handoutMasterIdLst>
   <p:sldIdLst>
     <p:sldId id="256" r:id="rId2"/>
@@ -22,11 +22,12 @@
     <p:sldId id="274" r:id="rId10"/>
     <p:sldId id="281" r:id="rId11"/>
     <p:sldId id="276" r:id="rId12"/>
-    <p:sldId id="280" r:id="rId13"/>
-    <p:sldId id="278" r:id="rId14"/>
-    <p:sldId id="279" r:id="rId15"/>
-    <p:sldId id="275" r:id="rId16"/>
-    <p:sldId id="277" r:id="rId17"/>
+    <p:sldId id="283" r:id="rId13"/>
+    <p:sldId id="280" r:id="rId14"/>
+    <p:sldId id="278" r:id="rId15"/>
+    <p:sldId id="279" r:id="rId16"/>
+    <p:sldId id="275" r:id="rId17"/>
+    <p:sldId id="277" r:id="rId18"/>
   </p:sldIdLst>
   <p:sldSz cx="12192000" cy="6858000"/>
   <p:notesSz cx="6858000" cy="9144000"/>
@@ -15707,7 +15708,7 @@
           <a:p>
             <a:r>
               <a:rPr lang="en-US" sz="3600" dirty="0"/>
-              <a:t>Three parts</a:t>
+              <a:t>Three parts (simple mode)</a:t>
             </a:r>
           </a:p>
         </p:txBody>
@@ -15795,6 +15796,142 @@
 </file>
 
 <file path=ppt/slides/slide12.xml><?xml version="1.0" encoding="utf-8"?>
+<p:sld xmlns:a="http://schemas.openxmlformats.org/drawingml/2006/main" xmlns:r="http://schemas.openxmlformats.org/officeDocument/2006/relationships" xmlns:p="http://schemas.openxmlformats.org/presentationml/2006/main">
+  <p:cSld>
+    <p:spTree>
+      <p:nvGrpSpPr>
+        <p:cNvPr id="1" name="">
+          <a:extLst>
+            <a:ext uri="{FF2B5EF4-FFF2-40B4-BE49-F238E27FC236}">
+              <a16:creationId xmlns:a16="http://schemas.microsoft.com/office/drawing/2014/main" id="{22683E45-0ABC-5679-0D8F-8B8473A6B63E}"/>
+            </a:ext>
+          </a:extLst>
+        </p:cNvPr>
+        <p:cNvGrpSpPr/>
+        <p:nvPr/>
+      </p:nvGrpSpPr>
+      <p:grpSpPr>
+        <a:xfrm>
+          <a:off x="0" y="0"/>
+          <a:ext cx="0" cy="0"/>
+          <a:chOff x="0" y="0"/>
+          <a:chExt cx="0" cy="0"/>
+        </a:xfrm>
+      </p:grpSpPr>
+      <p:sp>
+        <p:nvSpPr>
+          <p:cNvPr id="2" name="Title 1">
+            <a:extLst>
+              <a:ext uri="{FF2B5EF4-FFF2-40B4-BE49-F238E27FC236}">
+                <a16:creationId xmlns:a16="http://schemas.microsoft.com/office/drawing/2014/main" id="{E4254E6E-571D-9538-C510-7AB85CB519AF}"/>
+              </a:ext>
+            </a:extLst>
+          </p:cNvPr>
+          <p:cNvSpPr>
+            <a:spLocks noGrp="1"/>
+          </p:cNvSpPr>
+          <p:nvPr>
+            <p:ph type="title"/>
+          </p:nvPr>
+        </p:nvSpPr>
+        <p:spPr/>
+        <p:txBody>
+          <a:bodyPr>
+            <a:normAutofit/>
+          </a:bodyPr>
+          <a:lstStyle/>
+          <a:p>
+            <a:r>
+              <a:rPr lang="en-US" sz="3600" dirty="0"/>
+              <a:t>Three parts (advanced mode)</a:t>
+            </a:r>
+          </a:p>
+        </p:txBody>
+      </p:sp>
+      <p:sp>
+        <p:nvSpPr>
+          <p:cNvPr id="4" name="Content Placeholder 3">
+            <a:extLst>
+              <a:ext uri="{FF2B5EF4-FFF2-40B4-BE49-F238E27FC236}">
+                <a16:creationId xmlns:a16="http://schemas.microsoft.com/office/drawing/2014/main" id="{23A5E3FD-7752-8493-F4DD-1C503C1D2383}"/>
+              </a:ext>
+            </a:extLst>
+          </p:cNvPr>
+          <p:cNvSpPr>
+            <a:spLocks noGrp="1"/>
+          </p:cNvSpPr>
+          <p:nvPr>
+            <p:ph idx="1"/>
+          </p:nvPr>
+        </p:nvSpPr>
+        <p:spPr/>
+        <p:txBody>
+          <a:bodyPr>
+            <a:normAutofit/>
+          </a:bodyPr>
+          <a:lstStyle/>
+          <a:p>
+            <a:endParaRPr lang="en-NZ" dirty="0"/>
+          </a:p>
+          <a:p>
+            <a:r>
+              <a:rPr lang="en-NZ" sz="2800" dirty="0"/>
+              <a:t>Harvest - B2C user IDs, enqueues batches to migrate queue</a:t>
+            </a:r>
+          </a:p>
+          <a:p>
+            <a:r>
+              <a:rPr lang="en-NZ" sz="2800" dirty="0" err="1"/>
+              <a:t>WorkerMigrate</a:t>
+            </a:r>
+            <a:r>
+              <a:rPr lang="en-NZ" sz="2800" dirty="0"/>
+              <a:t> - </a:t>
+            </a:r>
+            <a:r>
+              <a:rPr lang="en-US" sz="2800" dirty="0"/>
+              <a:t>Dequeues IDs, fetches from B2C, creates in EEID, enqueues phone tasks</a:t>
+            </a:r>
+          </a:p>
+          <a:p>
+            <a:r>
+              <a:rPr lang="en-US" sz="2800" dirty="0" err="1"/>
+              <a:t>PhoneRegistration</a:t>
+            </a:r>
+            <a:r>
+              <a:rPr lang="en-US" sz="2800" dirty="0"/>
+              <a:t> - Fetches MFA phone from B2C, registers in EEID (throttled)</a:t>
+            </a:r>
+            <a:endParaRPr lang="en-NZ" sz="2800" dirty="0"/>
+          </a:p>
+        </p:txBody>
+      </p:sp>
+    </p:spTree>
+    <p:extLst>
+      <p:ext uri="{BB962C8B-B14F-4D97-AF65-F5344CB8AC3E}">
+        <p14:creationId xmlns:p14="http://schemas.microsoft.com/office/powerpoint/2010/main" val="3907849945"/>
+      </p:ext>
+    </p:extLst>
+  </p:cSld>
+  <p:clrMapOvr>
+    <a:masterClrMapping/>
+  </p:clrMapOvr>
+  <mc:AlternateContent xmlns:mc="http://schemas.openxmlformats.org/markup-compatibility/2006">
+    <mc:Choice xmlns:p14="http://schemas.microsoft.com/office/powerpoint/2010/main" Requires="p14">
+      <p:transition spd="med" p14:dur="700">
+        <p:fade/>
+      </p:transition>
+    </mc:Choice>
+    <mc:Fallback>
+      <p:transition spd="med">
+        <p:fade/>
+      </p:transition>
+    </mc:Fallback>
+  </mc:AlternateContent>
+</p:sld>
+</file>
+
+<file path=ppt/slides/slide13.xml><?xml version="1.0" encoding="utf-8"?>
 <p:sld xmlns:a="http://schemas.openxmlformats.org/drawingml/2006/main" xmlns:r="http://schemas.openxmlformats.org/officeDocument/2006/relationships" xmlns:p="http://schemas.openxmlformats.org/presentationml/2006/main">
   <p:cSld>
     <p:spTree>
@@ -15978,7 +16115,7 @@
 </p:sld>
 </file>
 
-<file path=ppt/slides/slide13.xml><?xml version="1.0" encoding="utf-8"?>
+<file path=ppt/slides/slide14.xml><?xml version="1.0" encoding="utf-8"?>
 <p:sld xmlns:a="http://schemas.openxmlformats.org/drawingml/2006/main" xmlns:r="http://schemas.openxmlformats.org/officeDocument/2006/relationships" xmlns:p="http://schemas.openxmlformats.org/presentationml/2006/main">
   <p:cSld>
     <p:spTree>
@@ -16183,7 +16320,7 @@
 </p:sld>
 </file>
 
-<file path=ppt/slides/slide14.xml><?xml version="1.0" encoding="utf-8"?>
+<file path=ppt/slides/slide15.xml><?xml version="1.0" encoding="utf-8"?>
 <p:sld xmlns:a="http://schemas.openxmlformats.org/drawingml/2006/main" xmlns:r="http://schemas.openxmlformats.org/officeDocument/2006/relationships" xmlns:p="http://schemas.openxmlformats.org/presentationml/2006/main">
   <p:cSld>
     <p:spTree>
@@ -16412,7 +16549,7 @@
 </p:sld>
 </file>
 
-<file path=ppt/slides/slide15.xml><?xml version="1.0" encoding="utf-8"?>
+<file path=ppt/slides/slide16.xml><?xml version="1.0" encoding="utf-8"?>
 <p:sld xmlns:a="http://schemas.openxmlformats.org/drawingml/2006/main" xmlns:r="http://schemas.openxmlformats.org/officeDocument/2006/relationships" xmlns:p="http://schemas.openxmlformats.org/presentationml/2006/main">
   <p:cSld>
     <p:spTree>
@@ -16530,7 +16667,7 @@
 </p:sld>
 </file>
 
-<file path=ppt/slides/slide16.xml><?xml version="1.0" encoding="utf-8"?>
+<file path=ppt/slides/slide17.xml><?xml version="1.0" encoding="utf-8"?>
 <p:sld xmlns:a="http://schemas.openxmlformats.org/drawingml/2006/main" xmlns:r="http://schemas.openxmlformats.org/officeDocument/2006/relationships" xmlns:p="http://schemas.openxmlformats.org/presentationml/2006/main">
   <p:cSld>
     <p:spTree>
